--- a/slides/slide-11.pptx
+++ b/slides/slide-11.pptx
@@ -4192,8 +4192,8 @@
         </p:nvSpPr>
         <p:spPr>
           <a:xfrm xmlns:a="http://schemas.openxmlformats.org/drawingml/2006/main">
-            <a:off x="609600" y="1638300"/>
-            <a:ext cx="10972800" cy="952500"/>
+            <a:off x="609600" y="1752600"/>
+            <a:ext cx="10972800" cy="1066800"/>
           </a:xfrm>
           <a:prstGeom xmlns:a="http://schemas.openxmlformats.org/drawingml/2006/main" prst="rect">
             <a:avLst/>
@@ -4204,12 +4204,12 @@
           </a:ln>
         </p:spPr>
         <p:txBody>
-          <a:bodyPr xmlns:a="http://schemas.openxmlformats.org/drawingml/2006/main" wrap="none" lIns="0" tIns="0" rIns="0" bIns="0" anchor="ctr">
+          <a:bodyPr xmlns:a="http://schemas.openxmlformats.org/drawingml/2006/main" wrap="none" lIns="0" tIns="0" rIns="0" bIns="0" anchor="t">
             <a:noAutofit/>
           </a:bodyPr>
           <a:lstStyle xmlns:a="http://schemas.openxmlformats.org/drawingml/2006/main">
-            <a:defPPr algn="ctr">
-              <a:defRPr sz="5250" b="1">
+            <a:defPPr algn="l">
+              <a:defRPr sz="5400" b="1">
                 <a:solidFill>
                   <a:srgbClr val="F7F7F2"/>
                 </a:solidFill>
@@ -4319,12 +4319,12 @@
             </a:lvl9pPr>
           </a:lstStyle>
           <a:p xmlns:a="http://schemas.openxmlformats.org/drawingml/2006/main">
-            <a:pPr algn="ctr">
+            <a:pPr algn="l">
               <a:lnSpc>
                 <a:spcPct val="115000"/>
               </a:lnSpc>
               <a:buNone/>
-              <a:defRPr sz="5250" b="1">
+              <a:defRPr sz="5400" b="1">
                 <a:solidFill>
                   <a:srgbClr val="F7F7F2"/>
                 </a:solidFill>
@@ -4334,7 +4334,7 @@
               </a:defRPr>
             </a:pPr>
             <a:r>
-              <a:rPr sz="5250" b="1">
+              <a:rPr sz="5400" b="1">
                 <a:solidFill>
                   <a:srgbClr val="F7F7F2"/>
                 </a:solidFill>
@@ -4363,8 +4363,8 @@
         </p:nvSpPr>
         <p:spPr>
           <a:xfrm xmlns:a="http://schemas.openxmlformats.org/drawingml/2006/main">
-            <a:off x="609600" y="2647950"/>
-            <a:ext cx="10972800" cy="952500"/>
+            <a:off x="609600" y="2971800"/>
+            <a:ext cx="10972800" cy="1066800"/>
           </a:xfrm>
           <a:prstGeom xmlns:a="http://schemas.openxmlformats.org/drawingml/2006/main" prst="rect">
             <a:avLst/>
@@ -4375,12 +4375,12 @@
           </a:ln>
         </p:spPr>
         <p:txBody>
-          <a:bodyPr xmlns:a="http://schemas.openxmlformats.org/drawingml/2006/main" wrap="none" lIns="0" tIns="0" rIns="0" bIns="0" anchor="ctr">
+          <a:bodyPr xmlns:a="http://schemas.openxmlformats.org/drawingml/2006/main" wrap="none" lIns="0" tIns="0" rIns="0" bIns="0" anchor="t">
             <a:noAutofit/>
           </a:bodyPr>
           <a:lstStyle xmlns:a="http://schemas.openxmlformats.org/drawingml/2006/main">
-            <a:defPPr algn="ctr">
-              <a:defRPr sz="5250" b="1">
+            <a:defPPr algn="l">
+              <a:defRPr sz="5400" b="1">
                 <a:solidFill>
                   <a:srgbClr val="F7F7F2"/>
                 </a:solidFill>
@@ -4490,12 +4490,12 @@
             </a:lvl9pPr>
           </a:lstStyle>
           <a:p xmlns:a="http://schemas.openxmlformats.org/drawingml/2006/main">
-            <a:pPr algn="ctr">
+            <a:pPr algn="l">
               <a:lnSpc>
                 <a:spcPct val="115000"/>
               </a:lnSpc>
               <a:buNone/>
-              <a:defRPr sz="5250" b="1">
+              <a:defRPr sz="5400" b="1">
                 <a:solidFill>
                   <a:srgbClr val="F7F7F2"/>
                 </a:solidFill>
@@ -4505,7 +4505,7 @@
               </a:defRPr>
             </a:pPr>
             <a:r>
-              <a:rPr sz="5250" b="1">
+              <a:rPr sz="5400" b="1">
                 <a:solidFill>
                   <a:srgbClr val="F7F7F2"/>
                 </a:solidFill>
@@ -4516,7 +4516,7 @@
               <a:t>and you will be </a:t>
             </a:r>
             <a:r>
-              <a:rPr sz="5250" b="1">
+              <a:rPr sz="5400" b="1">
                 <a:solidFill>
                   <a:srgbClr val="65E8D4"/>
                 </a:solidFill>
@@ -4545,8 +4545,8 @@
         </p:nvSpPr>
         <p:spPr>
           <a:xfrm xmlns:a="http://schemas.openxmlformats.org/drawingml/2006/main">
-            <a:off x="609600" y="4171950"/>
-            <a:ext cx="10972800" cy="581025"/>
+            <a:off x="4343400" y="5029200"/>
+            <a:ext cx="7239000" cy="609600"/>
           </a:xfrm>
           <a:prstGeom xmlns:a="http://schemas.openxmlformats.org/drawingml/2006/main" prst="rect">
             <a:avLst/>
@@ -4557,12 +4557,12 @@
           </a:ln>
         </p:spPr>
         <p:txBody>
-          <a:bodyPr xmlns:a="http://schemas.openxmlformats.org/drawingml/2006/main" wrap="none" lIns="0" tIns="0" rIns="0" bIns="0" anchor="ctr">
+          <a:bodyPr xmlns:a="http://schemas.openxmlformats.org/drawingml/2006/main" wrap="none" lIns="0" tIns="0" rIns="0" bIns="0" anchor="t">
             <a:noAutofit/>
           </a:bodyPr>
           <a:lstStyle xmlns:a="http://schemas.openxmlformats.org/drawingml/2006/main">
-            <a:defPPr algn="ctr">
-              <a:defRPr sz="2250" b="0">
+            <a:defPPr algn="l">
+              <a:defRPr sz="2100" b="0">
                 <a:solidFill>
                   <a:srgbClr val="A6A7B2"/>
                 </a:solidFill>
@@ -4672,12 +4672,12 @@
             </a:lvl9pPr>
           </a:lstStyle>
           <a:p xmlns:a="http://schemas.openxmlformats.org/drawingml/2006/main">
-            <a:pPr algn="ctr">
+            <a:pPr algn="l">
               <a:lnSpc>
                 <a:spcPct val="115000"/>
               </a:lnSpc>
               <a:buNone/>
-              <a:defRPr sz="2250" b="0">
+              <a:defRPr sz="2100" b="0">
                 <a:solidFill>
                   <a:srgbClr val="A6A7B2"/>
                 </a:solidFill>
@@ -4687,7 +4687,7 @@
               </a:defRPr>
             </a:pPr>
             <a:r>
-              <a:rPr sz="2250" b="0">
+              <a:rPr sz="2100" b="0">
                 <a:solidFill>
                   <a:srgbClr val="A6A7B2"/>
                 </a:solidFill>
@@ -4726,7 +4726,7 @@
         </p:blipFill>
         <p:spPr>
           <a:xfrm xmlns:a="http://schemas.openxmlformats.org/drawingml/2006/main">
-            <a:off x="609600" y="6524625"/>
+            <a:off x="609600" y="6400800"/>
             <a:ext cx="1952625" cy="228220"/>
           </a:xfrm>
           <a:prstGeom xmlns:a="http://schemas.openxmlformats.org/drawingml/2006/main" prst="rect">
@@ -4750,8 +4750,8 @@
         </p:nvSpPr>
         <p:spPr>
           <a:xfrm xmlns:a="http://schemas.openxmlformats.org/drawingml/2006/main">
-            <a:off x="11191875" y="6505575"/>
-            <a:ext cx="419100" cy="247650"/>
+            <a:off x="11163300" y="6400800"/>
+            <a:ext cx="419100" cy="228600"/>
           </a:xfrm>
           <a:prstGeom xmlns:a="http://schemas.openxmlformats.org/drawingml/2006/main" prst="rect">
             <a:avLst/>
@@ -4762,7 +4762,7 @@
           </a:ln>
         </p:spPr>
         <p:txBody>
-          <a:bodyPr xmlns:a="http://schemas.openxmlformats.org/drawingml/2006/main" wrap="none" lIns="0" tIns="0" rIns="0" bIns="0" anchor="ctr">
+          <a:bodyPr xmlns:a="http://schemas.openxmlformats.org/drawingml/2006/main" wrap="none" lIns="0" tIns="0" rIns="0" bIns="0" anchor="t">
             <a:noAutofit/>
           </a:bodyPr>
           <a:lstStyle xmlns:a="http://schemas.openxmlformats.org/drawingml/2006/main">
